--- a/中越詩歌/祝福歌_Bài ca chúc phước.pptx
+++ b/中越詩歌/祝福歌_Bài ca chúc phước.pptx
@@ -9,8 +9,9 @@
     <p:sldId id="258" r:id="rId3"/>
     <p:sldId id="259" r:id="rId4"/>
     <p:sldId id="260" r:id="rId5"/>
-    <p:sldId id="261" r:id="rId6"/>
-    <p:sldId id="262" r:id="rId7"/>
+    <p:sldId id="263" r:id="rId6"/>
+    <p:sldId id="261" r:id="rId7"/>
+    <p:sldId id="262" r:id="rId8"/>
   </p:sldIdLst>
   <p:sldSz cx="12192000" cy="6858000"/>
   <p:notesSz cx="6858000" cy="9144000"/>
@@ -109,6 +110,11 @@
       </a:defRPr>
     </a:lvl9pPr>
   </p:defaultTextStyle>
+  <p:extLst>
+    <p:ext uri="{EFAFB233-063F-42B5-8137-9DF3F51BA10A}">
+      <p15:sldGuideLst xmlns:p15="http://schemas.microsoft.com/office/powerpoint/2012/main"/>
+    </p:ext>
+  </p:extLst>
 </p:presentation>
 </file>
 
@@ -150,7 +156,7 @@
           <a:lstStyle/>
           <a:p>
             <a:r>
-              <a:rPr lang="en-US" altLang="zh-TW" smtClean="0"/>
+              <a:rPr lang="en-US" altLang="zh-TW"/>
               <a:t>Click to edit Master title style</a:t>
             </a:r>
             <a:endParaRPr lang="zh-TW" altLang="en-US"/>
@@ -269,7 +275,7 @@
           </a:lstStyle>
           <a:p>
             <a:r>
-              <a:rPr lang="en-US" altLang="zh-TW" smtClean="0"/>
+              <a:rPr lang="en-US" altLang="zh-TW"/>
               <a:t>Click to edit Master subtitle style</a:t>
             </a:r>
             <a:endParaRPr lang="zh-TW" altLang="en-US"/>
@@ -293,7 +299,7 @@
           <a:p>
             <a:fld id="{4DA6126E-E0EC-43E2-BDA8-1AB88FC7F8F5}" type="datetimeFigureOut">
               <a:rPr lang="vi-VN" smtClean="0"/>
-              <a:t>09/02/2021</a:t>
+              <a:t>26/01/2025</a:t>
             </a:fld>
             <a:endParaRPr lang="vi-VN"/>
           </a:p>
@@ -387,7 +393,7 @@
           <a:lstStyle/>
           <a:p>
             <a:r>
-              <a:rPr lang="en-US" altLang="zh-TW" smtClean="0"/>
+              <a:rPr lang="en-US" altLang="zh-TW"/>
               <a:t>Click to edit Master title style</a:t>
             </a:r>
             <a:endParaRPr lang="zh-TW" altLang="en-US"/>
@@ -411,35 +417,35 @@
           <a:p>
             <a:pPr lvl="0"/>
             <a:r>
-              <a:rPr lang="en-US" altLang="zh-TW" smtClean="0"/>
+              <a:rPr lang="en-US" altLang="zh-TW"/>
               <a:t>Edit Master text styles</a:t>
             </a:r>
           </a:p>
           <a:p>
             <a:pPr lvl="1"/>
             <a:r>
-              <a:rPr lang="en-US" altLang="zh-TW" smtClean="0"/>
+              <a:rPr lang="en-US" altLang="zh-TW"/>
               <a:t>Second level</a:t>
             </a:r>
           </a:p>
           <a:p>
             <a:pPr lvl="2"/>
             <a:r>
-              <a:rPr lang="en-US" altLang="zh-TW" smtClean="0"/>
+              <a:rPr lang="en-US" altLang="zh-TW"/>
               <a:t>Third level</a:t>
             </a:r>
           </a:p>
           <a:p>
             <a:pPr lvl="3"/>
             <a:r>
-              <a:rPr lang="en-US" altLang="zh-TW" smtClean="0"/>
+              <a:rPr lang="en-US" altLang="zh-TW"/>
               <a:t>Fourth level</a:t>
             </a:r>
           </a:p>
           <a:p>
             <a:pPr lvl="4"/>
             <a:r>
-              <a:rPr lang="en-US" altLang="zh-TW" smtClean="0"/>
+              <a:rPr lang="en-US" altLang="zh-TW"/>
               <a:t>Fifth level</a:t>
             </a:r>
             <a:endParaRPr lang="zh-TW" altLang="en-US"/>
@@ -463,7 +469,7 @@
           <a:p>
             <a:fld id="{4DA6126E-E0EC-43E2-BDA8-1AB88FC7F8F5}" type="datetimeFigureOut">
               <a:rPr lang="vi-VN" smtClean="0"/>
-              <a:t>09/02/2021</a:t>
+              <a:t>26/01/2025</a:t>
             </a:fld>
             <a:endParaRPr lang="vi-VN"/>
           </a:p>
@@ -562,7 +568,7 @@
           <a:lstStyle/>
           <a:p>
             <a:r>
-              <a:rPr lang="en-US" altLang="zh-TW" smtClean="0"/>
+              <a:rPr lang="en-US" altLang="zh-TW"/>
               <a:t>Click to edit Master title style</a:t>
             </a:r>
             <a:endParaRPr lang="zh-TW" altLang="en-US"/>
@@ -591,35 +597,35 @@
           <a:p>
             <a:pPr lvl="0"/>
             <a:r>
-              <a:rPr lang="en-US" altLang="zh-TW" smtClean="0"/>
+              <a:rPr lang="en-US" altLang="zh-TW"/>
               <a:t>Edit Master text styles</a:t>
             </a:r>
           </a:p>
           <a:p>
             <a:pPr lvl="1"/>
             <a:r>
-              <a:rPr lang="en-US" altLang="zh-TW" smtClean="0"/>
+              <a:rPr lang="en-US" altLang="zh-TW"/>
               <a:t>Second level</a:t>
             </a:r>
           </a:p>
           <a:p>
             <a:pPr lvl="2"/>
             <a:r>
-              <a:rPr lang="en-US" altLang="zh-TW" smtClean="0"/>
+              <a:rPr lang="en-US" altLang="zh-TW"/>
               <a:t>Third level</a:t>
             </a:r>
           </a:p>
           <a:p>
             <a:pPr lvl="3"/>
             <a:r>
-              <a:rPr lang="en-US" altLang="zh-TW" smtClean="0"/>
+              <a:rPr lang="en-US" altLang="zh-TW"/>
               <a:t>Fourth level</a:t>
             </a:r>
           </a:p>
           <a:p>
             <a:pPr lvl="4"/>
             <a:r>
-              <a:rPr lang="en-US" altLang="zh-TW" smtClean="0"/>
+              <a:rPr lang="en-US" altLang="zh-TW"/>
               <a:t>Fifth level</a:t>
             </a:r>
             <a:endParaRPr lang="zh-TW" altLang="en-US"/>
@@ -643,7 +649,7 @@
           <a:p>
             <a:fld id="{4DA6126E-E0EC-43E2-BDA8-1AB88FC7F8F5}" type="datetimeFigureOut">
               <a:rPr lang="vi-VN" smtClean="0"/>
-              <a:t>09/02/2021</a:t>
+              <a:t>26/01/2025</a:t>
             </a:fld>
             <a:endParaRPr lang="vi-VN"/>
           </a:p>
@@ -737,7 +743,7 @@
           <a:lstStyle/>
           <a:p>
             <a:r>
-              <a:rPr lang="en-US" altLang="zh-TW" smtClean="0"/>
+              <a:rPr lang="en-US" altLang="zh-TW"/>
               <a:t>Click to edit Master title style</a:t>
             </a:r>
             <a:endParaRPr lang="zh-TW" altLang="en-US"/>
@@ -761,35 +767,35 @@
           <a:p>
             <a:pPr lvl="0"/>
             <a:r>
-              <a:rPr lang="en-US" altLang="zh-TW" smtClean="0"/>
+              <a:rPr lang="en-US" altLang="zh-TW"/>
               <a:t>Edit Master text styles</a:t>
             </a:r>
           </a:p>
           <a:p>
             <a:pPr lvl="1"/>
             <a:r>
-              <a:rPr lang="en-US" altLang="zh-TW" smtClean="0"/>
+              <a:rPr lang="en-US" altLang="zh-TW"/>
               <a:t>Second level</a:t>
             </a:r>
           </a:p>
           <a:p>
             <a:pPr lvl="2"/>
             <a:r>
-              <a:rPr lang="en-US" altLang="zh-TW" smtClean="0"/>
+              <a:rPr lang="en-US" altLang="zh-TW"/>
               <a:t>Third level</a:t>
             </a:r>
           </a:p>
           <a:p>
             <a:pPr lvl="3"/>
             <a:r>
-              <a:rPr lang="en-US" altLang="zh-TW" smtClean="0"/>
+              <a:rPr lang="en-US" altLang="zh-TW"/>
               <a:t>Fourth level</a:t>
             </a:r>
           </a:p>
           <a:p>
             <a:pPr lvl="4"/>
             <a:r>
-              <a:rPr lang="en-US" altLang="zh-TW" smtClean="0"/>
+              <a:rPr lang="en-US" altLang="zh-TW"/>
               <a:t>Fifth level</a:t>
             </a:r>
             <a:endParaRPr lang="zh-TW" altLang="en-US"/>
@@ -813,7 +819,7 @@
           <a:p>
             <a:fld id="{4DA6126E-E0EC-43E2-BDA8-1AB88FC7F8F5}" type="datetimeFigureOut">
               <a:rPr lang="vi-VN" smtClean="0"/>
-              <a:t>09/02/2021</a:t>
+              <a:t>26/01/2025</a:t>
             </a:fld>
             <a:endParaRPr lang="vi-VN"/>
           </a:p>
@@ -916,7 +922,7 @@
           </a:lstStyle>
           <a:p>
             <a:r>
-              <a:rPr lang="en-US" altLang="zh-TW" smtClean="0"/>
+              <a:rPr lang="en-US" altLang="zh-TW"/>
               <a:t>Click to edit Master title style</a:t>
             </a:r>
             <a:endParaRPr lang="zh-TW" altLang="en-US"/>
@@ -1036,7 +1042,7 @@
           <a:p>
             <a:pPr lvl="0"/>
             <a:r>
-              <a:rPr lang="en-US" altLang="zh-TW" smtClean="0"/>
+              <a:rPr lang="en-US" altLang="zh-TW"/>
               <a:t>Edit Master text styles</a:t>
             </a:r>
           </a:p>
@@ -1059,7 +1065,7 @@
           <a:p>
             <a:fld id="{4DA6126E-E0EC-43E2-BDA8-1AB88FC7F8F5}" type="datetimeFigureOut">
               <a:rPr lang="vi-VN" smtClean="0"/>
-              <a:t>09/02/2021</a:t>
+              <a:t>26/01/2025</a:t>
             </a:fld>
             <a:endParaRPr lang="vi-VN"/>
           </a:p>
@@ -1153,7 +1159,7 @@
           <a:lstStyle/>
           <a:p>
             <a:r>
-              <a:rPr lang="en-US" altLang="zh-TW" smtClean="0"/>
+              <a:rPr lang="en-US" altLang="zh-TW"/>
               <a:t>Click to edit Master title style</a:t>
             </a:r>
             <a:endParaRPr lang="zh-TW" altLang="en-US"/>
@@ -1210,35 +1216,35 @@
           <a:p>
             <a:pPr lvl="0"/>
             <a:r>
-              <a:rPr lang="en-US" altLang="zh-TW" smtClean="0"/>
+              <a:rPr lang="en-US" altLang="zh-TW"/>
               <a:t>Edit Master text styles</a:t>
             </a:r>
           </a:p>
           <a:p>
             <a:pPr lvl="1"/>
             <a:r>
-              <a:rPr lang="en-US" altLang="zh-TW" smtClean="0"/>
+              <a:rPr lang="en-US" altLang="zh-TW"/>
               <a:t>Second level</a:t>
             </a:r>
           </a:p>
           <a:p>
             <a:pPr lvl="2"/>
             <a:r>
-              <a:rPr lang="en-US" altLang="zh-TW" smtClean="0"/>
+              <a:rPr lang="en-US" altLang="zh-TW"/>
               <a:t>Third level</a:t>
             </a:r>
           </a:p>
           <a:p>
             <a:pPr lvl="3"/>
             <a:r>
-              <a:rPr lang="en-US" altLang="zh-TW" smtClean="0"/>
+              <a:rPr lang="en-US" altLang="zh-TW"/>
               <a:t>Fourth level</a:t>
             </a:r>
           </a:p>
           <a:p>
             <a:pPr lvl="4"/>
             <a:r>
-              <a:rPr lang="en-US" altLang="zh-TW" smtClean="0"/>
+              <a:rPr lang="en-US" altLang="zh-TW"/>
               <a:t>Fifth level</a:t>
             </a:r>
             <a:endParaRPr lang="zh-TW" altLang="en-US"/>
@@ -1295,35 +1301,35 @@
           <a:p>
             <a:pPr lvl="0"/>
             <a:r>
-              <a:rPr lang="en-US" altLang="zh-TW" smtClean="0"/>
+              <a:rPr lang="en-US" altLang="zh-TW"/>
               <a:t>Edit Master text styles</a:t>
             </a:r>
           </a:p>
           <a:p>
             <a:pPr lvl="1"/>
             <a:r>
-              <a:rPr lang="en-US" altLang="zh-TW" smtClean="0"/>
+              <a:rPr lang="en-US" altLang="zh-TW"/>
               <a:t>Second level</a:t>
             </a:r>
           </a:p>
           <a:p>
             <a:pPr lvl="2"/>
             <a:r>
-              <a:rPr lang="en-US" altLang="zh-TW" smtClean="0"/>
+              <a:rPr lang="en-US" altLang="zh-TW"/>
               <a:t>Third level</a:t>
             </a:r>
           </a:p>
           <a:p>
             <a:pPr lvl="3"/>
             <a:r>
-              <a:rPr lang="en-US" altLang="zh-TW" smtClean="0"/>
+              <a:rPr lang="en-US" altLang="zh-TW"/>
               <a:t>Fourth level</a:t>
             </a:r>
           </a:p>
           <a:p>
             <a:pPr lvl="4"/>
             <a:r>
-              <a:rPr lang="en-US" altLang="zh-TW" smtClean="0"/>
+              <a:rPr lang="en-US" altLang="zh-TW"/>
               <a:t>Fifth level</a:t>
             </a:r>
             <a:endParaRPr lang="zh-TW" altLang="en-US"/>
@@ -1347,7 +1353,7 @@
           <a:p>
             <a:fld id="{4DA6126E-E0EC-43E2-BDA8-1AB88FC7F8F5}" type="datetimeFigureOut">
               <a:rPr lang="vi-VN" smtClean="0"/>
-              <a:t>09/02/2021</a:t>
+              <a:t>26/01/2025</a:t>
             </a:fld>
             <a:endParaRPr lang="vi-VN"/>
           </a:p>
@@ -1445,7 +1451,7 @@
           </a:lstStyle>
           <a:p>
             <a:r>
-              <a:rPr lang="en-US" altLang="zh-TW" smtClean="0"/>
+              <a:rPr lang="en-US" altLang="zh-TW"/>
               <a:t>Click to edit Master title style</a:t>
             </a:r>
             <a:endParaRPr lang="zh-TW" altLang="en-US"/>
@@ -1511,7 +1517,7 @@
           <a:p>
             <a:pPr lvl="0"/>
             <a:r>
-              <a:rPr lang="en-US" altLang="zh-TW" smtClean="0"/>
+              <a:rPr lang="en-US" altLang="zh-TW"/>
               <a:t>Edit Master text styles</a:t>
             </a:r>
           </a:p>
@@ -1567,35 +1573,35 @@
           <a:p>
             <a:pPr lvl="0"/>
             <a:r>
-              <a:rPr lang="en-US" altLang="zh-TW" smtClean="0"/>
+              <a:rPr lang="en-US" altLang="zh-TW"/>
               <a:t>Edit Master text styles</a:t>
             </a:r>
           </a:p>
           <a:p>
             <a:pPr lvl="1"/>
             <a:r>
-              <a:rPr lang="en-US" altLang="zh-TW" smtClean="0"/>
+              <a:rPr lang="en-US" altLang="zh-TW"/>
               <a:t>Second level</a:t>
             </a:r>
           </a:p>
           <a:p>
             <a:pPr lvl="2"/>
             <a:r>
-              <a:rPr lang="en-US" altLang="zh-TW" smtClean="0"/>
+              <a:rPr lang="en-US" altLang="zh-TW"/>
               <a:t>Third level</a:t>
             </a:r>
           </a:p>
           <a:p>
             <a:pPr lvl="3"/>
             <a:r>
-              <a:rPr lang="en-US" altLang="zh-TW" smtClean="0"/>
+              <a:rPr lang="en-US" altLang="zh-TW"/>
               <a:t>Fourth level</a:t>
             </a:r>
           </a:p>
           <a:p>
             <a:pPr lvl="4"/>
             <a:r>
-              <a:rPr lang="en-US" altLang="zh-TW" smtClean="0"/>
+              <a:rPr lang="en-US" altLang="zh-TW"/>
               <a:t>Fifth level</a:t>
             </a:r>
             <a:endParaRPr lang="zh-TW" altLang="en-US"/>
@@ -1661,7 +1667,7 @@
           <a:p>
             <a:pPr lvl="0"/>
             <a:r>
-              <a:rPr lang="en-US" altLang="zh-TW" smtClean="0"/>
+              <a:rPr lang="en-US" altLang="zh-TW"/>
               <a:t>Edit Master text styles</a:t>
             </a:r>
           </a:p>
@@ -1717,35 +1723,35 @@
           <a:p>
             <a:pPr lvl="0"/>
             <a:r>
-              <a:rPr lang="en-US" altLang="zh-TW" smtClean="0"/>
+              <a:rPr lang="en-US" altLang="zh-TW"/>
               <a:t>Edit Master text styles</a:t>
             </a:r>
           </a:p>
           <a:p>
             <a:pPr lvl="1"/>
             <a:r>
-              <a:rPr lang="en-US" altLang="zh-TW" smtClean="0"/>
+              <a:rPr lang="en-US" altLang="zh-TW"/>
               <a:t>Second level</a:t>
             </a:r>
           </a:p>
           <a:p>
             <a:pPr lvl="2"/>
             <a:r>
-              <a:rPr lang="en-US" altLang="zh-TW" smtClean="0"/>
+              <a:rPr lang="en-US" altLang="zh-TW"/>
               <a:t>Third level</a:t>
             </a:r>
           </a:p>
           <a:p>
             <a:pPr lvl="3"/>
             <a:r>
-              <a:rPr lang="en-US" altLang="zh-TW" smtClean="0"/>
+              <a:rPr lang="en-US" altLang="zh-TW"/>
               <a:t>Fourth level</a:t>
             </a:r>
           </a:p>
           <a:p>
             <a:pPr lvl="4"/>
             <a:r>
-              <a:rPr lang="en-US" altLang="zh-TW" smtClean="0"/>
+              <a:rPr lang="en-US" altLang="zh-TW"/>
               <a:t>Fifth level</a:t>
             </a:r>
             <a:endParaRPr lang="zh-TW" altLang="en-US"/>
@@ -1769,7 +1775,7 @@
           <a:p>
             <a:fld id="{4DA6126E-E0EC-43E2-BDA8-1AB88FC7F8F5}" type="datetimeFigureOut">
               <a:rPr lang="vi-VN" smtClean="0"/>
-              <a:t>09/02/2021</a:t>
+              <a:t>26/01/2025</a:t>
             </a:fld>
             <a:endParaRPr lang="vi-VN"/>
           </a:p>
@@ -1863,7 +1869,7 @@
           <a:lstStyle/>
           <a:p>
             <a:r>
-              <a:rPr lang="en-US" altLang="zh-TW" smtClean="0"/>
+              <a:rPr lang="en-US" altLang="zh-TW"/>
               <a:t>Click to edit Master title style</a:t>
             </a:r>
             <a:endParaRPr lang="zh-TW" altLang="en-US"/>
@@ -1887,7 +1893,7 @@
           <a:p>
             <a:fld id="{4DA6126E-E0EC-43E2-BDA8-1AB88FC7F8F5}" type="datetimeFigureOut">
               <a:rPr lang="vi-VN" smtClean="0"/>
-              <a:t>09/02/2021</a:t>
+              <a:t>26/01/2025</a:t>
             </a:fld>
             <a:endParaRPr lang="vi-VN"/>
           </a:p>
@@ -1982,7 +1988,7 @@
           <a:p>
             <a:fld id="{4DA6126E-E0EC-43E2-BDA8-1AB88FC7F8F5}" type="datetimeFigureOut">
               <a:rPr lang="vi-VN" smtClean="0"/>
-              <a:t>09/02/2021</a:t>
+              <a:t>26/01/2025</a:t>
             </a:fld>
             <a:endParaRPr lang="vi-VN"/>
           </a:p>
@@ -2085,7 +2091,7 @@
           </a:lstStyle>
           <a:p>
             <a:r>
-              <a:rPr lang="en-US" altLang="zh-TW" smtClean="0"/>
+              <a:rPr lang="en-US" altLang="zh-TW"/>
               <a:t>Click to edit Master title style</a:t>
             </a:r>
             <a:endParaRPr lang="zh-TW" altLang="en-US"/>
@@ -2142,35 +2148,35 @@
           <a:p>
             <a:pPr lvl="0"/>
             <a:r>
-              <a:rPr lang="en-US" altLang="zh-TW" smtClean="0"/>
+              <a:rPr lang="en-US" altLang="zh-TW"/>
               <a:t>Edit Master text styles</a:t>
             </a:r>
           </a:p>
           <a:p>
             <a:pPr lvl="1"/>
             <a:r>
-              <a:rPr lang="en-US" altLang="zh-TW" smtClean="0"/>
+              <a:rPr lang="en-US" altLang="zh-TW"/>
               <a:t>Second level</a:t>
             </a:r>
           </a:p>
           <a:p>
             <a:pPr lvl="2"/>
             <a:r>
-              <a:rPr lang="en-US" altLang="zh-TW" smtClean="0"/>
+              <a:rPr lang="en-US" altLang="zh-TW"/>
               <a:t>Third level</a:t>
             </a:r>
           </a:p>
           <a:p>
             <a:pPr lvl="3"/>
             <a:r>
-              <a:rPr lang="en-US" altLang="zh-TW" smtClean="0"/>
+              <a:rPr lang="en-US" altLang="zh-TW"/>
               <a:t>Fourth level</a:t>
             </a:r>
           </a:p>
           <a:p>
             <a:pPr lvl="4"/>
             <a:r>
-              <a:rPr lang="en-US" altLang="zh-TW" smtClean="0"/>
+              <a:rPr lang="en-US" altLang="zh-TW"/>
               <a:t>Fifth level</a:t>
             </a:r>
             <a:endParaRPr lang="zh-TW" altLang="en-US"/>
@@ -2236,7 +2242,7 @@
           <a:p>
             <a:pPr lvl="0"/>
             <a:r>
-              <a:rPr lang="en-US" altLang="zh-TW" smtClean="0"/>
+              <a:rPr lang="en-US" altLang="zh-TW"/>
               <a:t>Edit Master text styles</a:t>
             </a:r>
           </a:p>
@@ -2259,7 +2265,7 @@
           <a:p>
             <a:fld id="{4DA6126E-E0EC-43E2-BDA8-1AB88FC7F8F5}" type="datetimeFigureOut">
               <a:rPr lang="vi-VN" smtClean="0"/>
-              <a:t>09/02/2021</a:t>
+              <a:t>26/01/2025</a:t>
             </a:fld>
             <a:endParaRPr lang="vi-VN"/>
           </a:p>
@@ -2362,7 +2368,7 @@
           </a:lstStyle>
           <a:p>
             <a:r>
-              <a:rPr lang="en-US" altLang="zh-TW" smtClean="0"/>
+              <a:rPr lang="en-US" altLang="zh-TW"/>
               <a:t>Click to edit Master title style</a:t>
             </a:r>
             <a:endParaRPr lang="zh-TW" altLang="en-US"/>
@@ -2427,7 +2433,7 @@
           </a:lstStyle>
           <a:p>
             <a:r>
-              <a:rPr lang="en-US" altLang="zh-TW" smtClean="0"/>
+              <a:rPr lang="en-US" altLang="zh-TW"/>
               <a:t>Click icon to add picture</a:t>
             </a:r>
             <a:endParaRPr lang="zh-TW" altLang="en-US"/>
@@ -2493,7 +2499,7 @@
           <a:p>
             <a:pPr lvl="0"/>
             <a:r>
-              <a:rPr lang="en-US" altLang="zh-TW" smtClean="0"/>
+              <a:rPr lang="en-US" altLang="zh-TW"/>
               <a:t>Edit Master text styles</a:t>
             </a:r>
           </a:p>
@@ -2516,7 +2522,7 @@
           <a:p>
             <a:fld id="{4DA6126E-E0EC-43E2-BDA8-1AB88FC7F8F5}" type="datetimeFigureOut">
               <a:rPr lang="vi-VN" smtClean="0"/>
-              <a:t>09/02/2021</a:t>
+              <a:t>26/01/2025</a:t>
             </a:fld>
             <a:endParaRPr lang="vi-VN"/>
           </a:p>
@@ -2630,10 +2636,9 @@
           <a:lstStyle/>
           <a:p>
             <a:r>
-              <a:rPr lang="zh-TW" altLang="en-US" smtClean="0"/>
+              <a:rPr lang="zh-TW" altLang="en-US"/>
               <a:t>按一下以編輯母片標題樣式</a:t>
             </a:r>
-            <a:endParaRPr lang="zh-TW" altLang="en-US"/>
           </a:p>
         </p:txBody>
       </p:sp>
@@ -2664,38 +2669,37 @@
           <a:p>
             <a:pPr lvl="0"/>
             <a:r>
-              <a:rPr lang="zh-TW" altLang="en-US" smtClean="0"/>
+              <a:rPr lang="zh-TW" altLang="en-US"/>
               <a:t>按一下以編輯母片文字樣式</a:t>
             </a:r>
           </a:p>
           <a:p>
             <a:pPr lvl="1"/>
             <a:r>
-              <a:rPr lang="zh-TW" altLang="en-US" smtClean="0"/>
+              <a:rPr lang="zh-TW" altLang="en-US"/>
               <a:t>第二層</a:t>
             </a:r>
           </a:p>
           <a:p>
             <a:pPr lvl="2"/>
             <a:r>
-              <a:rPr lang="zh-TW" altLang="en-US" smtClean="0"/>
+              <a:rPr lang="zh-TW" altLang="en-US"/>
               <a:t>第三層</a:t>
             </a:r>
           </a:p>
           <a:p>
             <a:pPr lvl="3"/>
             <a:r>
-              <a:rPr lang="zh-TW" altLang="en-US" smtClean="0"/>
+              <a:rPr lang="zh-TW" altLang="en-US"/>
               <a:t>第四層</a:t>
             </a:r>
           </a:p>
           <a:p>
             <a:pPr lvl="4"/>
             <a:r>
-              <a:rPr lang="zh-TW" altLang="en-US" smtClean="0"/>
+              <a:rPr lang="zh-TW" altLang="en-US"/>
               <a:t>第五層</a:t>
             </a:r>
-            <a:endParaRPr lang="zh-TW" altLang="en-US"/>
           </a:p>
         </p:txBody>
       </p:sp>
@@ -2734,7 +2738,7 @@
           <a:p>
             <a:fld id="{4DA6126E-E0EC-43E2-BDA8-1AB88FC7F8F5}" type="datetimeFigureOut">
               <a:rPr lang="vi-VN" smtClean="0"/>
-              <a:t>09/02/2021</a:t>
+              <a:t>26/01/2025</a:t>
             </a:fld>
             <a:endParaRPr lang="vi-VN"/>
           </a:p>
@@ -3146,24 +3150,7 @@
                 <a:latin typeface="微軟正黑體" pitchFamily="34" charset="-120"/>
                 <a:ea typeface="微軟正黑體" pitchFamily="34" charset="-120"/>
               </a:rPr>
-              <a:t>祝</a:t>
-            </a:r>
-            <a:r>
-              <a:rPr lang="zh-CN" altLang="en-US" sz="7200" b="1" i="1" dirty="0">
-                <a:solidFill>
-                  <a:srgbClr val="000066"/>
-                </a:solidFill>
-                <a:effectLst>
-                  <a:outerShdw blurRad="38100" dist="38100" dir="2700000" algn="tl">
-                    <a:srgbClr val="000000">
-                      <a:alpha val="43137"/>
-                    </a:srgbClr>
-                  </a:outerShdw>
-                </a:effectLst>
-                <a:latin typeface="微軟正黑體" pitchFamily="34" charset="-120"/>
-                <a:ea typeface="微軟正黑體" pitchFamily="34" charset="-120"/>
-              </a:rPr>
-              <a:t>福歌</a:t>
+              <a:t>祝福歌</a:t>
             </a:r>
             <a:endParaRPr lang="zh-TW" altLang="en-US" sz="7200" b="1" i="1" dirty="0">
               <a:solidFill>
@@ -3236,43 +3223,7 @@
                 <a:ea typeface="微軟正黑體" pitchFamily="34" charset="-120"/>
                 <a:cs typeface="Calibri" panose="020F0502020204030204" pitchFamily="34" charset="0"/>
               </a:rPr>
-              <a:t>Bài </a:t>
-            </a:r>
-            <a:r>
-              <a:rPr lang="vi-VN" sz="5400" b="1" i="1" dirty="0">
-                <a:solidFill>
-                  <a:srgbClr val="660033"/>
-                </a:solidFill>
-                <a:effectLst>
-                  <a:outerShdw blurRad="38100" dist="38100" dir="2700000" algn="tl">
-                    <a:srgbClr val="000000">
-                      <a:alpha val="43137"/>
-                    </a:srgbClr>
-                  </a:outerShdw>
-                </a:effectLst>
-                <a:latin typeface="Calibri" panose="020F0502020204030204" pitchFamily="34" charset="0"/>
-                <a:ea typeface="微軟正黑體" pitchFamily="34" charset="-120"/>
-                <a:cs typeface="Calibri" panose="020F0502020204030204" pitchFamily="34" charset="0"/>
-              </a:rPr>
-              <a:t>ca chúc </a:t>
-            </a:r>
-            <a:r>
-              <a:rPr lang="vi-VN" sz="5400" b="1" i="1" dirty="0">
-                <a:solidFill>
-                  <a:srgbClr val="660033"/>
-                </a:solidFill>
-                <a:effectLst>
-                  <a:outerShdw blurRad="38100" dist="38100" dir="2700000" algn="tl">
-                    <a:srgbClr val="000000">
-                      <a:alpha val="43137"/>
-                    </a:srgbClr>
-                  </a:outerShdw>
-                </a:effectLst>
-                <a:latin typeface="Calibri" panose="020F0502020204030204" pitchFamily="34" charset="0"/>
-                <a:ea typeface="微軟正黑體" pitchFamily="34" charset="-120"/>
-                <a:cs typeface="Calibri" panose="020F0502020204030204" pitchFamily="34" charset="0"/>
-              </a:rPr>
-              <a:t>phước</a:t>
+              <a:t>Bài ca chúc phước</a:t>
             </a:r>
             <a:endParaRPr lang="zh-TW" altLang="en-US" sz="5400" b="1" i="1" dirty="0">
               <a:solidFill>
@@ -3355,27 +3306,7 @@
                 <a:latin typeface="微軟正黑體" pitchFamily="34" charset="-120"/>
                 <a:ea typeface="微軟正黑體" pitchFamily="34" charset="-120"/>
               </a:rPr>
-              <a:t>願</a:t>
-            </a:r>
-            <a:r>
-              <a:rPr lang="zh-TW" altLang="en-US" sz="6400" b="1" dirty="0">
-                <a:solidFill>
-                  <a:srgbClr val="000066"/>
-                </a:solidFill>
-                <a:latin typeface="微軟正黑體" pitchFamily="34" charset="-120"/>
-                <a:ea typeface="微軟正黑體" pitchFamily="34" charset="-120"/>
-              </a:rPr>
-              <a:t>主耶穌的恩</a:t>
-            </a:r>
-            <a:r>
-              <a:rPr lang="zh-TW" altLang="en-US" sz="6400" b="1" dirty="0">
-                <a:solidFill>
-                  <a:srgbClr val="000066"/>
-                </a:solidFill>
-                <a:latin typeface="微軟正黑體" pitchFamily="34" charset="-120"/>
-                <a:ea typeface="微軟正黑體" pitchFamily="34" charset="-120"/>
-              </a:rPr>
-              <a:t>惠</a:t>
+              <a:t>願主耶穌的恩惠</a:t>
             </a:r>
             <a:endParaRPr lang="en-US" altLang="zh-CN" sz="6400" b="1" dirty="0">
               <a:solidFill>
@@ -3558,18 +3489,7 @@
                 <a:ea typeface="微軟正黑體" pitchFamily="34" charset="-120"/>
                 <a:cs typeface="Calibri" panose="020F0502020204030204" pitchFamily="34" charset="0"/>
               </a:rPr>
-              <a:t>Nguyện </a:t>
-            </a:r>
-            <a:r>
-              <a:rPr lang="vi-VN" b="1" dirty="0">
-                <a:solidFill>
-                  <a:srgbClr val="660033"/>
-                </a:solidFill>
-                <a:latin typeface="Calibri" panose="020F0502020204030204" pitchFamily="34" charset="0"/>
-                <a:ea typeface="微軟正黑體" pitchFamily="34" charset="-120"/>
-                <a:cs typeface="Calibri" panose="020F0502020204030204" pitchFamily="34" charset="0"/>
-              </a:rPr>
-              <a:t>xin ơn Cha đổ nơi anh</a:t>
+              <a:t>Nguyện xin ơn Cha đổ nơi anh</a:t>
             </a:r>
             <a:endParaRPr lang="en-US" b="1" dirty="0">
               <a:solidFill>
@@ -3828,51 +3748,7 @@
                 <a:ea typeface="微軟正黑體" pitchFamily="34" charset="-120"/>
                 <a:cs typeface="Calibri" panose="020F0502020204030204" pitchFamily="34" charset="0"/>
               </a:rPr>
-              <a:t>N</a:t>
-            </a:r>
-            <a:r>
-              <a:rPr lang="vi-VN" b="1" dirty="0">
-                <a:solidFill>
-                  <a:srgbClr val="660033"/>
-                </a:solidFill>
-                <a:latin typeface="Calibri" panose="020F0502020204030204" pitchFamily="34" charset="0"/>
-                <a:ea typeface="微軟正黑體" pitchFamily="34" charset="-120"/>
-                <a:cs typeface="Calibri" panose="020F0502020204030204" pitchFamily="34" charset="0"/>
-              </a:rPr>
-              <a:t>ăm </a:t>
-            </a:r>
-            <a:r>
-              <a:rPr lang="vi-VN" b="1" dirty="0">
-                <a:solidFill>
-                  <a:srgbClr val="660033"/>
-                </a:solidFill>
-                <a:latin typeface="Calibri" panose="020F0502020204030204" pitchFamily="34" charset="0"/>
-                <a:ea typeface="微軟正黑體" pitchFamily="34" charset="-120"/>
-                <a:cs typeface="Calibri" panose="020F0502020204030204" pitchFamily="34" charset="0"/>
-              </a:rPr>
-              <a:t>mới với bao </a:t>
-            </a:r>
-            <a:r>
-              <a:rPr lang="vi-VN" b="1" dirty="0">
-                <a:solidFill>
-                  <a:srgbClr val="660033"/>
-                </a:solidFill>
-                <a:latin typeface="Calibri" panose="020F0502020204030204" pitchFamily="34" charset="0"/>
-                <a:ea typeface="微軟正黑體" pitchFamily="34" charset="-120"/>
-                <a:cs typeface="Calibri" panose="020F0502020204030204" pitchFamily="34" charset="0"/>
-              </a:rPr>
-              <a:t>phước </a:t>
-            </a:r>
-            <a:r>
-              <a:rPr lang="vi-VN" b="1" dirty="0">
-                <a:solidFill>
-                  <a:srgbClr val="660033"/>
-                </a:solidFill>
-                <a:latin typeface="Calibri" panose="020F0502020204030204" pitchFamily="34" charset="0"/>
-                <a:ea typeface="微軟正黑體" pitchFamily="34" charset="-120"/>
-                <a:cs typeface="Calibri" panose="020F0502020204030204" pitchFamily="34" charset="0"/>
-              </a:rPr>
-              <a:t>Thiên ban</a:t>
+              <a:t>Năm mới với bao phước Thiên ban</a:t>
             </a:r>
             <a:endParaRPr lang="en-US" b="1" dirty="0">
               <a:solidFill>
@@ -3948,47 +3824,7 @@
                 <a:latin typeface="微軟正黑體" pitchFamily="34" charset="-120"/>
                 <a:ea typeface="微軟正黑體" pitchFamily="34" charset="-120"/>
               </a:rPr>
-              <a:t>願聖靈的感</a:t>
-            </a:r>
-            <a:r>
-              <a:rPr lang="zh-TW" altLang="en-US" sz="6400" b="1" dirty="0">
-                <a:solidFill>
-                  <a:srgbClr val="000066"/>
-                </a:solidFill>
-                <a:latin typeface="微軟正黑體" pitchFamily="34" charset="-120"/>
-                <a:ea typeface="微軟正黑體" pitchFamily="34" charset="-120"/>
-              </a:rPr>
-              <a:t>動</a:t>
-            </a:r>
-            <a:r>
-              <a:rPr lang="vi-VN" altLang="zh-TW" sz="6400" b="1" dirty="0">
-                <a:solidFill>
-                  <a:srgbClr val="000066"/>
-                </a:solidFill>
-                <a:latin typeface="微軟正黑體" pitchFamily="34" charset="-120"/>
-                <a:ea typeface="微軟正黑體" pitchFamily="34" charset="-120"/>
-              </a:rPr>
-              <a:t>  </a:t>
-            </a:r>
-            <a:r>
-              <a:rPr lang="zh-TW" altLang="en-US" sz="6400" b="1" dirty="0">
-                <a:solidFill>
-                  <a:srgbClr val="000066"/>
-                </a:solidFill>
-                <a:latin typeface="微軟正黑體" pitchFamily="34" charset="-120"/>
-                <a:ea typeface="微軟正黑體" pitchFamily="34" charset="-120"/>
-              </a:rPr>
-              <a:t>常</a:t>
-            </a:r>
-            <a:r>
-              <a:rPr lang="zh-TW" altLang="en-US" sz="6400" b="1" dirty="0">
-                <a:solidFill>
-                  <a:srgbClr val="000066"/>
-                </a:solidFill>
-                <a:latin typeface="微軟正黑體" pitchFamily="34" charset="-120"/>
-                <a:ea typeface="微軟正黑體" pitchFamily="34" charset="-120"/>
-              </a:rPr>
-              <a:t>與你們同在</a:t>
+              <a:t>願聖靈的感動</a:t>
             </a:r>
             <a:endParaRPr lang="en-US" altLang="zh-CN" sz="6400" b="1" dirty="0">
               <a:solidFill>
@@ -4163,7 +3999,7 @@
               <a:buNone/>
             </a:pPr>
             <a:r>
-              <a:rPr lang="vi-VN" sz="3200" b="1" dirty="0">
+              <a:rPr lang="vi-VN" b="1" dirty="0">
                 <a:solidFill>
                   <a:srgbClr val="660033"/>
                 </a:solidFill>
@@ -4171,53 +4007,9 @@
                 <a:ea typeface="微軟正黑體" pitchFamily="34" charset="-120"/>
                 <a:cs typeface="Calibri" panose="020F0502020204030204" pitchFamily="34" charset="0"/>
               </a:rPr>
-              <a:t>V</a:t>
-            </a:r>
-            <a:r>
-              <a:rPr lang="vi-VN" sz="3200" b="1" dirty="0">
-                <a:solidFill>
-                  <a:srgbClr val="660033"/>
-                </a:solidFill>
-                <a:latin typeface="Calibri" panose="020F0502020204030204" pitchFamily="34" charset="0"/>
-                <a:ea typeface="微軟正黑體" pitchFamily="34" charset="-120"/>
-                <a:cs typeface="Calibri" panose="020F0502020204030204" pitchFamily="34" charset="0"/>
-              </a:rPr>
-              <a:t>âng </a:t>
-            </a:r>
-            <a:r>
-              <a:rPr lang="vi-VN" sz="3200" b="1" dirty="0">
-                <a:solidFill>
-                  <a:srgbClr val="660033"/>
-                </a:solidFill>
-                <a:latin typeface="Calibri" panose="020F0502020204030204" pitchFamily="34" charset="0"/>
-                <a:ea typeface="微軟正黑體" pitchFamily="34" charset="-120"/>
-                <a:cs typeface="Calibri" panose="020F0502020204030204" pitchFamily="34" charset="0"/>
-              </a:rPr>
-              <a:t>giữ Thánh Ngôn như Chúa Giê-xu, </a:t>
-            </a:r>
-            <a:r>
-              <a:rPr lang="vi-VN" sz="3200" b="1" dirty="0">
-                <a:solidFill>
-                  <a:srgbClr val="660033"/>
-                </a:solidFill>
-                <a:latin typeface="Calibri" panose="020F0502020204030204" pitchFamily="34" charset="0"/>
-                <a:ea typeface="微軟正黑體" pitchFamily="34" charset="-120"/>
-                <a:cs typeface="Calibri" panose="020F0502020204030204" pitchFamily="34" charset="0"/>
-              </a:rPr>
-              <a:t>sống </a:t>
-            </a:r>
-            <a:r>
-              <a:rPr lang="vi-VN" sz="3200" b="1" dirty="0">
-                <a:solidFill>
-                  <a:srgbClr val="660033"/>
-                </a:solidFill>
-                <a:latin typeface="Calibri" panose="020F0502020204030204" pitchFamily="34" charset="0"/>
-                <a:ea typeface="微軟正黑體" pitchFamily="34" charset="-120"/>
-                <a:cs typeface="Calibri" panose="020F0502020204030204" pitchFamily="34" charset="0"/>
-              </a:rPr>
-              <a:t>phúc âm vì tha nhân</a:t>
-            </a:r>
-            <a:endParaRPr lang="en-US" sz="3200" b="1" dirty="0">
+              <a:t>Vâng giữ Thánh Ngôn như Chúa Giê-xu</a:t>
+            </a:r>
+            <a:endParaRPr lang="en-US" b="1" dirty="0">
               <a:solidFill>
                 <a:srgbClr val="660033"/>
               </a:solidFill>
@@ -4246,7 +4038,13 @@
   <p:cSld>
     <p:spTree>
       <p:nvGrpSpPr>
-        <p:cNvPr id="1" name=""/>
+        <p:cNvPr id="1" name="">
+          <a:extLst>
+            <a:ext uri="{FF2B5EF4-FFF2-40B4-BE49-F238E27FC236}">
+              <a16:creationId xmlns:a16="http://schemas.microsoft.com/office/drawing/2014/main" id="{B9CB4DEE-E283-3753-64E8-CD8BE69086E0}"/>
+            </a:ext>
+          </a:extLst>
+        </p:cNvPr>
         <p:cNvGrpSpPr/>
         <p:nvPr/>
       </p:nvGrpSpPr>
@@ -4260,7 +4058,13 @@
       </p:grpSpPr>
       <p:sp>
         <p:nvSpPr>
-          <p:cNvPr id="5" name="內容版面配置區 4"/>
+          <p:cNvPr id="5" name="內容版面配置區 4">
+            <a:extLst>
+              <a:ext uri="{FF2B5EF4-FFF2-40B4-BE49-F238E27FC236}">
+                <a16:creationId xmlns:a16="http://schemas.microsoft.com/office/drawing/2014/main" id="{985071C3-B26B-6457-E3FF-97735184F89D}"/>
+              </a:ext>
+            </a:extLst>
+          </p:cNvPr>
           <p:cNvSpPr>
             <a:spLocks noGrp="1"/>
           </p:cNvSpPr>
@@ -4284,14 +4088,14 @@
               <a:buNone/>
             </a:pPr>
             <a:r>
-              <a:rPr lang="zh-CN" altLang="en-US" sz="6400" b="1" dirty="0">
+              <a:rPr lang="zh-TW" altLang="en-US" sz="6400" b="1" dirty="0">
                 <a:solidFill>
                   <a:srgbClr val="000066"/>
                 </a:solidFill>
                 <a:latin typeface="微軟正黑體" pitchFamily="34" charset="-120"/>
                 <a:ea typeface="微軟正黑體" pitchFamily="34" charset="-120"/>
               </a:rPr>
-              <a:t>祝福祝福祝福你呀</a:t>
+              <a:t>常與你們同在</a:t>
             </a:r>
             <a:endParaRPr lang="en-US" altLang="zh-CN" sz="6400" b="1" dirty="0">
               <a:solidFill>
@@ -4305,7 +4109,13 @@
       </p:sp>
       <p:sp>
         <p:nvSpPr>
-          <p:cNvPr id="3" name="內容版面配置區 4"/>
+          <p:cNvPr id="3" name="內容版面配置區 4">
+            <a:extLst>
+              <a:ext uri="{FF2B5EF4-FFF2-40B4-BE49-F238E27FC236}">
+                <a16:creationId xmlns:a16="http://schemas.microsoft.com/office/drawing/2014/main" id="{AB7B0A3F-8B22-4E70-DCA2-3F39AF738F82}"/>
+              </a:ext>
+            </a:extLst>
+          </p:cNvPr>
           <p:cNvSpPr txBox="1">
             <a:spLocks/>
           </p:cNvSpPr>
@@ -4474,29 +4284,7 @@
                 <a:ea typeface="微軟正黑體" pitchFamily="34" charset="-120"/>
                 <a:cs typeface="Calibri" panose="020F0502020204030204" pitchFamily="34" charset="0"/>
               </a:rPr>
-              <a:t>xin Chúa ban </a:t>
-            </a:r>
-            <a:r>
-              <a:rPr lang="vi-VN" b="1" dirty="0">
-                <a:solidFill>
-                  <a:srgbClr val="660033"/>
-                </a:solidFill>
-                <a:latin typeface="Calibri" panose="020F0502020204030204" pitchFamily="34" charset="0"/>
-                <a:ea typeface="微軟正黑體" pitchFamily="34" charset="-120"/>
-                <a:cs typeface="Calibri" panose="020F0502020204030204" pitchFamily="34" charset="0"/>
-              </a:rPr>
-              <a:t>phước </a:t>
-            </a:r>
-            <a:r>
-              <a:rPr lang="vi-VN" b="1" dirty="0">
-                <a:solidFill>
-                  <a:srgbClr val="660033"/>
-                </a:solidFill>
-                <a:latin typeface="Calibri" panose="020F0502020204030204" pitchFamily="34" charset="0"/>
-                <a:ea typeface="微軟正黑體" pitchFamily="34" charset="-120"/>
-                <a:cs typeface="Calibri" panose="020F0502020204030204" pitchFamily="34" charset="0"/>
-              </a:rPr>
-              <a:t>cho mọi người nhá</a:t>
+              <a:t>sống phúc âm vì tha nhân</a:t>
             </a:r>
             <a:endParaRPr lang="en-US" b="1" dirty="0">
               <a:solidFill>
@@ -4512,7 +4300,7 @@
     </p:spTree>
     <p:extLst>
       <p:ext uri="{BB962C8B-B14F-4D97-AF65-F5344CB8AC3E}">
-        <p14:creationId xmlns:p14="http://schemas.microsoft.com/office/powerpoint/2010/main" val="1161342736"/>
+        <p14:creationId xmlns:p14="http://schemas.microsoft.com/office/powerpoint/2010/main" val="3104786629"/>
       </p:ext>
     </p:extLst>
   </p:cSld>
@@ -4572,7 +4360,7 @@
                 <a:latin typeface="微軟正黑體" pitchFamily="34" charset="-120"/>
                 <a:ea typeface="微軟正黑體" pitchFamily="34" charset="-120"/>
               </a:rPr>
-              <a:t>祝福祝福祝福你</a:t>
+              <a:t>祝福  祝福  祝福你呀</a:t>
             </a:r>
             <a:endParaRPr lang="en-US" altLang="zh-CN" sz="6400" b="1" dirty="0">
               <a:solidFill>
@@ -4747,7 +4535,7 @@
               <a:buNone/>
             </a:pPr>
             <a:r>
-              <a:rPr lang="vi-VN" b="1" dirty="0">
+              <a:rPr lang="en-US" b="1" dirty="0">
                 <a:solidFill>
                   <a:srgbClr val="660033"/>
                 </a:solidFill>
@@ -4755,7 +4543,288 @@
                 <a:ea typeface="微軟正黑體" pitchFamily="34" charset="-120"/>
                 <a:cs typeface="Calibri" panose="020F0502020204030204" pitchFamily="34" charset="0"/>
               </a:rPr>
-              <a:t>luôn khắc ghi Phước Cha mọi ngày</a:t>
+              <a:t>X</a:t>
+            </a:r>
+            <a:r>
+              <a:rPr lang="vi-VN" b="1" dirty="0">
+                <a:solidFill>
+                  <a:srgbClr val="660033"/>
+                </a:solidFill>
+                <a:latin typeface="Calibri" panose="020F0502020204030204" pitchFamily="34" charset="0"/>
+                <a:ea typeface="微軟正黑體" pitchFamily="34" charset="-120"/>
+                <a:cs typeface="Calibri" panose="020F0502020204030204" pitchFamily="34" charset="0"/>
+              </a:rPr>
+              <a:t>in Chúa ban phước cho mọi người nhá</a:t>
+            </a:r>
+            <a:endParaRPr lang="en-US" b="1" dirty="0">
+              <a:solidFill>
+                <a:srgbClr val="660033"/>
+              </a:solidFill>
+              <a:latin typeface="Calibri" panose="020F0502020204030204" pitchFamily="34" charset="0"/>
+              <a:ea typeface="微軟正黑體" pitchFamily="34" charset="-120"/>
+              <a:cs typeface="Calibri" panose="020F0502020204030204" pitchFamily="34" charset="0"/>
+            </a:endParaRPr>
+          </a:p>
+        </p:txBody>
+      </p:sp>
+    </p:spTree>
+    <p:extLst>
+      <p:ext uri="{BB962C8B-B14F-4D97-AF65-F5344CB8AC3E}">
+        <p14:creationId xmlns:p14="http://schemas.microsoft.com/office/powerpoint/2010/main" val="1161342736"/>
+      </p:ext>
+    </p:extLst>
+  </p:cSld>
+  <p:clrMapOvr>
+    <a:masterClrMapping/>
+  </p:clrMapOvr>
+</p:sld>
+</file>
+
+<file path=ppt/slides/slide7.xml><?xml version="1.0" encoding="utf-8"?>
+<p:sld xmlns:a="http://schemas.openxmlformats.org/drawingml/2006/main" xmlns:r="http://schemas.openxmlformats.org/officeDocument/2006/relationships" xmlns:p="http://schemas.openxmlformats.org/presentationml/2006/main">
+  <p:cSld>
+    <p:spTree>
+      <p:nvGrpSpPr>
+        <p:cNvPr id="1" name=""/>
+        <p:cNvGrpSpPr/>
+        <p:nvPr/>
+      </p:nvGrpSpPr>
+      <p:grpSpPr>
+        <a:xfrm>
+          <a:off x="0" y="0"/>
+          <a:ext cx="0" cy="0"/>
+          <a:chOff x="0" y="0"/>
+          <a:chExt cx="0" cy="0"/>
+        </a:xfrm>
+      </p:grpSpPr>
+      <p:sp>
+        <p:nvSpPr>
+          <p:cNvPr id="5" name="內容版面配置區 4"/>
+          <p:cNvSpPr>
+            <a:spLocks noGrp="1"/>
+          </p:cNvSpPr>
+          <p:nvPr>
+            <p:ph idx="1"/>
+          </p:nvPr>
+        </p:nvSpPr>
+        <p:spPr>
+          <a:xfrm>
+            <a:off x="0" y="2167981"/>
+            <a:ext cx="12192000" cy="1318225"/>
+          </a:xfrm>
+        </p:spPr>
+        <p:txBody>
+          <a:bodyPr anchor="ctr">
+            <a:normAutofit/>
+          </a:bodyPr>
+          <a:lstStyle/>
+          <a:p>
+            <a:pPr algn="ctr">
+              <a:buNone/>
+            </a:pPr>
+            <a:r>
+              <a:rPr lang="zh-CN" altLang="en-US" sz="6400" b="1" dirty="0">
+                <a:solidFill>
+                  <a:srgbClr val="000066"/>
+                </a:solidFill>
+                <a:latin typeface="微軟正黑體" pitchFamily="34" charset="-120"/>
+                <a:ea typeface="微軟正黑體" pitchFamily="34" charset="-120"/>
+              </a:rPr>
+              <a:t>祝福  祝福  祝福你</a:t>
+            </a:r>
+            <a:endParaRPr lang="en-US" altLang="zh-CN" sz="6400" b="1" dirty="0">
+              <a:solidFill>
+                <a:srgbClr val="000066"/>
+              </a:solidFill>
+              <a:latin typeface="微軟正黑體" pitchFamily="34" charset="-120"/>
+              <a:ea typeface="微軟正黑體" pitchFamily="34" charset="-120"/>
+            </a:endParaRPr>
+          </a:p>
+        </p:txBody>
+      </p:sp>
+      <p:sp>
+        <p:nvSpPr>
+          <p:cNvPr id="3" name="內容版面配置區 4"/>
+          <p:cNvSpPr txBox="1">
+            <a:spLocks/>
+          </p:cNvSpPr>
+          <p:nvPr/>
+        </p:nvSpPr>
+        <p:spPr>
+          <a:xfrm>
+            <a:off x="0" y="3117530"/>
+            <a:ext cx="12192000" cy="1318225"/>
+          </a:xfrm>
+          <a:prstGeom prst="rect">
+            <a:avLst/>
+          </a:prstGeom>
+        </p:spPr>
+        <p:txBody>
+          <a:bodyPr vert="horz" lIns="91440" tIns="45720" rIns="91440" bIns="45720" rtlCol="0" anchor="ctr">
+            <a:noAutofit/>
+          </a:bodyPr>
+          <a:lstStyle>
+            <a:lvl1pPr marL="457189" indent="-457189" algn="l" defTabSz="1219170" rtl="0" eaLnBrk="1" latinLnBrk="0" hangingPunct="1">
+              <a:spcBef>
+                <a:spcPct val="20000"/>
+              </a:spcBef>
+              <a:buFont typeface="Arial" pitchFamily="34" charset="0"/>
+              <a:buChar char="•"/>
+              <a:defRPr sz="4267" kern="1200">
+                <a:solidFill>
+                  <a:schemeClr val="tx1"/>
+                </a:solidFill>
+                <a:latin typeface="+mn-lt"/>
+                <a:ea typeface="+mn-ea"/>
+                <a:cs typeface="+mn-cs"/>
+              </a:defRPr>
+            </a:lvl1pPr>
+            <a:lvl2pPr marL="990575" indent="-380990" algn="l" defTabSz="1219170" rtl="0" eaLnBrk="1" latinLnBrk="0" hangingPunct="1">
+              <a:spcBef>
+                <a:spcPct val="20000"/>
+              </a:spcBef>
+              <a:buFont typeface="Arial" pitchFamily="34" charset="0"/>
+              <a:buChar char="–"/>
+              <a:defRPr sz="3733" kern="1200">
+                <a:solidFill>
+                  <a:schemeClr val="tx1"/>
+                </a:solidFill>
+                <a:latin typeface="+mn-lt"/>
+                <a:ea typeface="+mn-ea"/>
+                <a:cs typeface="+mn-cs"/>
+              </a:defRPr>
+            </a:lvl2pPr>
+            <a:lvl3pPr marL="1523962" indent="-304792" algn="l" defTabSz="1219170" rtl="0" eaLnBrk="1" latinLnBrk="0" hangingPunct="1">
+              <a:spcBef>
+                <a:spcPct val="20000"/>
+              </a:spcBef>
+              <a:buFont typeface="Arial" pitchFamily="34" charset="0"/>
+              <a:buChar char="•"/>
+              <a:defRPr sz="3200" kern="1200">
+                <a:solidFill>
+                  <a:schemeClr val="tx1"/>
+                </a:solidFill>
+                <a:latin typeface="+mn-lt"/>
+                <a:ea typeface="+mn-ea"/>
+                <a:cs typeface="+mn-cs"/>
+              </a:defRPr>
+            </a:lvl3pPr>
+            <a:lvl4pPr marL="2133547" indent="-304792" algn="l" defTabSz="1219170" rtl="0" eaLnBrk="1" latinLnBrk="0" hangingPunct="1">
+              <a:spcBef>
+                <a:spcPct val="20000"/>
+              </a:spcBef>
+              <a:buFont typeface="Arial" pitchFamily="34" charset="0"/>
+              <a:buChar char="–"/>
+              <a:defRPr sz="2667" kern="1200">
+                <a:solidFill>
+                  <a:schemeClr val="tx1"/>
+                </a:solidFill>
+                <a:latin typeface="+mn-lt"/>
+                <a:ea typeface="+mn-ea"/>
+                <a:cs typeface="+mn-cs"/>
+              </a:defRPr>
+            </a:lvl4pPr>
+            <a:lvl5pPr marL="2743131" indent="-304792" algn="l" defTabSz="1219170" rtl="0" eaLnBrk="1" latinLnBrk="0" hangingPunct="1">
+              <a:spcBef>
+                <a:spcPct val="20000"/>
+              </a:spcBef>
+              <a:buFont typeface="Arial" pitchFamily="34" charset="0"/>
+              <a:buChar char="»"/>
+              <a:defRPr sz="2667" kern="1200">
+                <a:solidFill>
+                  <a:schemeClr val="tx1"/>
+                </a:solidFill>
+                <a:latin typeface="+mn-lt"/>
+                <a:ea typeface="+mn-ea"/>
+                <a:cs typeface="+mn-cs"/>
+              </a:defRPr>
+            </a:lvl5pPr>
+            <a:lvl6pPr marL="3352716" indent="-304792" algn="l" defTabSz="1219170" rtl="0" eaLnBrk="1" latinLnBrk="0" hangingPunct="1">
+              <a:spcBef>
+                <a:spcPct val="20000"/>
+              </a:spcBef>
+              <a:buFont typeface="Arial" pitchFamily="34" charset="0"/>
+              <a:buChar char="•"/>
+              <a:defRPr sz="2667" kern="1200">
+                <a:solidFill>
+                  <a:schemeClr val="tx1"/>
+                </a:solidFill>
+                <a:latin typeface="+mn-lt"/>
+                <a:ea typeface="+mn-ea"/>
+                <a:cs typeface="+mn-cs"/>
+              </a:defRPr>
+            </a:lvl6pPr>
+            <a:lvl7pPr marL="3962301" indent="-304792" algn="l" defTabSz="1219170" rtl="0" eaLnBrk="1" latinLnBrk="0" hangingPunct="1">
+              <a:spcBef>
+                <a:spcPct val="20000"/>
+              </a:spcBef>
+              <a:buFont typeface="Arial" pitchFamily="34" charset="0"/>
+              <a:buChar char="•"/>
+              <a:defRPr sz="2667" kern="1200">
+                <a:solidFill>
+                  <a:schemeClr val="tx1"/>
+                </a:solidFill>
+                <a:latin typeface="+mn-lt"/>
+                <a:ea typeface="+mn-ea"/>
+                <a:cs typeface="+mn-cs"/>
+              </a:defRPr>
+            </a:lvl7pPr>
+            <a:lvl8pPr marL="4571886" indent="-304792" algn="l" defTabSz="1219170" rtl="0" eaLnBrk="1" latinLnBrk="0" hangingPunct="1">
+              <a:spcBef>
+                <a:spcPct val="20000"/>
+              </a:spcBef>
+              <a:buFont typeface="Arial" pitchFamily="34" charset="0"/>
+              <a:buChar char="•"/>
+              <a:defRPr sz="2667" kern="1200">
+                <a:solidFill>
+                  <a:schemeClr val="tx1"/>
+                </a:solidFill>
+                <a:latin typeface="+mn-lt"/>
+                <a:ea typeface="+mn-ea"/>
+                <a:cs typeface="+mn-cs"/>
+              </a:defRPr>
+            </a:lvl8pPr>
+            <a:lvl9pPr marL="5181470" indent="-304792" algn="l" defTabSz="1219170" rtl="0" eaLnBrk="1" latinLnBrk="0" hangingPunct="1">
+              <a:spcBef>
+                <a:spcPct val="20000"/>
+              </a:spcBef>
+              <a:buFont typeface="Arial" pitchFamily="34" charset="0"/>
+              <a:buChar char="•"/>
+              <a:defRPr sz="2667" kern="1200">
+                <a:solidFill>
+                  <a:schemeClr val="tx1"/>
+                </a:solidFill>
+                <a:latin typeface="+mn-lt"/>
+                <a:ea typeface="+mn-ea"/>
+                <a:cs typeface="+mn-cs"/>
+              </a:defRPr>
+            </a:lvl9pPr>
+          </a:lstStyle>
+          <a:p>
+            <a:pPr marL="0" indent="0" algn="ctr">
+              <a:buNone/>
+            </a:pPr>
+            <a:r>
+              <a:rPr lang="en-US" b="1" dirty="0">
+                <a:solidFill>
+                  <a:srgbClr val="660033"/>
+                </a:solidFill>
+                <a:latin typeface="Calibri" panose="020F0502020204030204" pitchFamily="34" charset="0"/>
+                <a:ea typeface="微軟正黑體" pitchFamily="34" charset="-120"/>
+                <a:cs typeface="Calibri" panose="020F0502020204030204" pitchFamily="34" charset="0"/>
+              </a:rPr>
+              <a:t>L</a:t>
+            </a:r>
+            <a:r>
+              <a:rPr lang="vi-VN" b="1" dirty="0">
+                <a:solidFill>
+                  <a:srgbClr val="660033"/>
+                </a:solidFill>
+                <a:latin typeface="Calibri" panose="020F0502020204030204" pitchFamily="34" charset="0"/>
+                <a:ea typeface="微軟正黑體" pitchFamily="34" charset="-120"/>
+                <a:cs typeface="Calibri" panose="020F0502020204030204" pitchFamily="34" charset="0"/>
+              </a:rPr>
+              <a:t>uôn khắc ghi Phước Cha mọi ngày</a:t>
             </a:r>
             <a:endParaRPr lang="en-US" b="1" dirty="0">
               <a:solidFill>
